--- a/Store Support/Projects/TDA Insights/TDA_WK10_Report.pptx
+++ b/Store Support/Projects/TDA Insights/TDA_WK10_Report.pptx
@@ -3303,7 +3303,7 @@
         <p:spPr>
           <a:xfrm>
             <a:off x="0" y="0"/>
-            <a:ext cx="9144000" cy="6717248"/>
+            <a:ext cx="9144000" cy="6858000"/>
           </a:xfrm>
           <a:prstGeom prst="rect">
             <a:avLst/>
@@ -3387,7 +3387,7 @@
         <p:spPr>
           <a:xfrm>
             <a:off x="0" y="0"/>
-            <a:ext cx="9144000" cy="6858000"/>
+            <a:ext cx="9144000" cy="3387745"/>
           </a:xfrm>
           <a:prstGeom prst="rect">
             <a:avLst/>
@@ -3429,7 +3429,7 @@
         <p:spPr>
           <a:xfrm>
             <a:off x="0" y="0"/>
-            <a:ext cx="9144000" cy="3251847"/>
+            <a:ext cx="9144000" cy="6858000"/>
           </a:xfrm>
           <a:prstGeom prst="rect">
             <a:avLst/>
@@ -3471,7 +3471,7 @@
         <p:spPr>
           <a:xfrm>
             <a:off x="0" y="0"/>
-            <a:ext cx="9144000" cy="6858000"/>
+            <a:ext cx="9144000" cy="2096713"/>
           </a:xfrm>
           <a:prstGeom prst="rect">
             <a:avLst/>
@@ -3765,7 +3765,7 @@
         <p:spPr>
           <a:xfrm>
             <a:off x="0" y="0"/>
-            <a:ext cx="9144000" cy="5799936"/>
+            <a:ext cx="9144000" cy="6139681"/>
           </a:xfrm>
           <a:prstGeom prst="rect">
             <a:avLst/>
@@ -3891,7 +3891,7 @@
         <p:spPr>
           <a:xfrm>
             <a:off x="0" y="0"/>
-            <a:ext cx="9144000" cy="6858000"/>
+            <a:ext cx="9144000" cy="6819171"/>
           </a:xfrm>
           <a:prstGeom prst="rect">
             <a:avLst/>
